--- a/presentaciones/clase01_fundamentos_ecosistema.pptx
+++ b/presentaciones/clase01_fundamentos_ecosistema.pptx
@@ -4023,7 +4023,7 @@
                           </a:solidFill>
                           <a:latin typeface="Fira Sans"/>
                         </a:rPr>
-                        <a:t>25%</a:t>
+                        <a:t>30%</a:t>
                       </a:r>
                     </a:p>
                   </a:txBody>
